--- a/00-overview.pptx
+++ b/00-overview.pptx
@@ -15567,41 +15567,49 @@
           </a:p>
         </p:txBody>
       </p:sp>
-      <p:cxnSp>
-        <p:nvCxnSpPr>
-          <p:cNvPr id="25" name="Connector 24"/>
-          <p:cNvCxnSpPr/>
-          <p:nvPr/>
-        </p:nvCxnSpPr>
-        <p:spPr>
-          <a:xfrm flipH="1" flipV="1">
-            <a:off x="640080" y="0"/>
-            <a:ext cx="7863840" cy="3200400"/>
-          </a:xfrm>
-          <a:prstGeom prst="line">
-            <a:avLst/>
-          </a:prstGeom>
-          <a:ln w="25400">
-            <a:solidFill>
-              <a:srgbClr val="0E7C66"/>
-            </a:solidFill>
+      <p:sp>
+        <p:nvSpPr>
+          <p:cNvPr id="25" name="Right Arrow 24"/>
+          <p:cNvSpPr/>
+          <p:nvPr/>
+        </p:nvSpPr>
+        <p:spPr>
+          <a:xfrm>
+            <a:off x="8503920" y="3063240"/>
+            <a:ext cx="640080" cy="274320"/>
+          </a:xfrm>
+          <a:prstGeom prst="rightArrow">
+            <a:avLst/>
+          </a:prstGeom>
+          <a:solidFill>
+            <a:srgbClr val="0E7C66"/>
+          </a:solidFill>
+          <a:ln>
+            <a:noFill/>
           </a:ln>
         </p:spPr>
         <p:style>
-          <a:lnRef idx="2">
+          <a:lnRef idx="1">
             <a:schemeClr val="accent1"/>
           </a:lnRef>
-          <a:fillRef idx="0">
+          <a:fillRef idx="3">
             <a:schemeClr val="accent1"/>
           </a:fillRef>
-          <a:effectRef idx="1">
+          <a:effectRef idx="2">
             <a:schemeClr val="accent1"/>
           </a:effectRef>
           <a:fontRef idx="minor">
-            <a:schemeClr val="tx1"/>
+            <a:schemeClr val="lt1"/>
           </a:fontRef>
         </p:style>
-      </p:cxnSp>
+        <p:txBody>
+          <a:bodyPr rtlCol="0" anchor="ctr"/>
+          <a:lstStyle/>
+          <a:p>
+            <a:pPr algn="ctr"/>
+          </a:p>
+        </p:txBody>
+      </p:sp>
       <p:sp>
         <p:nvSpPr>
           <p:cNvPr id="26" name="Rounded Rectangle 25"/>
@@ -15718,41 +15726,49 @@
           </a:p>
         </p:txBody>
       </p:sp>
-      <p:cxnSp>
-        <p:nvCxnSpPr>
-          <p:cNvPr id="29" name="Connector 28"/>
-          <p:cNvCxnSpPr/>
-          <p:nvPr/>
-        </p:nvCxnSpPr>
-        <p:spPr>
-          <a:xfrm flipH="1" flipV="1">
-            <a:off x="457200" y="0"/>
-            <a:ext cx="2743200" cy="3200400"/>
-          </a:xfrm>
-          <a:prstGeom prst="line">
-            <a:avLst/>
-          </a:prstGeom>
-          <a:ln w="25400">
-            <a:solidFill>
-              <a:srgbClr val="2C2C2C"/>
-            </a:solidFill>
+      <p:sp>
+        <p:nvSpPr>
+          <p:cNvPr id="29" name="Right Arrow 28"/>
+          <p:cNvSpPr/>
+          <p:nvPr/>
+        </p:nvSpPr>
+        <p:spPr>
+          <a:xfrm>
+            <a:off x="3200400" y="3063240"/>
+            <a:ext cx="457200" cy="274320"/>
+          </a:xfrm>
+          <a:prstGeom prst="rightArrow">
+            <a:avLst/>
+          </a:prstGeom>
+          <a:solidFill>
+            <a:srgbClr val="2C2C2C"/>
+          </a:solidFill>
+          <a:ln>
+            <a:noFill/>
           </a:ln>
         </p:spPr>
         <p:style>
-          <a:lnRef idx="2">
+          <a:lnRef idx="1">
             <a:schemeClr val="accent1"/>
           </a:lnRef>
-          <a:fillRef idx="0">
+          <a:fillRef idx="3">
             <a:schemeClr val="accent1"/>
           </a:fillRef>
-          <a:effectRef idx="1">
+          <a:effectRef idx="2">
             <a:schemeClr val="accent1"/>
           </a:effectRef>
           <a:fontRef idx="minor">
-            <a:schemeClr val="tx1"/>
+            <a:schemeClr val="lt1"/>
           </a:fontRef>
         </p:style>
-      </p:cxnSp>
+        <p:txBody>
+          <a:bodyPr rtlCol="0" anchor="ctr"/>
+          <a:lstStyle/>
+          <a:p>
+            <a:pPr algn="ctr"/>
+          </a:p>
+        </p:txBody>
+      </p:sp>
       <p:sp>
         <p:nvSpPr>
           <p:cNvPr id="30" name="Rounded Rectangle 29"/>
